--- a/presentation/Smart_Recruitment_Assistant_Professional_Updated (1).pptx
+++ b/presentation/Smart_Recruitment_Assistant_Professional_Updated (1).pptx
@@ -16,8 +16,7 @@
     <p:sldId id="264" r:id="rId10"/>
     <p:sldId id="265" r:id="rId11"/>
     <p:sldId id="267" r:id="rId12"/>
-    <p:sldId id="269" r:id="rId13"/>
-    <p:sldId id="268" r:id="rId14"/>
+    <p:sldId id="268" r:id="rId13"/>
   </p:sldIdLst>
   <p:sldSz cx="12192000" cy="6858000"/>
   <p:notesSz cx="6858000" cy="9144000"/>
@@ -323,7 +322,7 @@
           <a:p>
             <a:fld id="{5BCAD085-E8A6-8845-BD4E-CB4CCA059FC4}" type="datetimeFigureOut">
               <a:rPr lang="en-US" smtClean="0"/>
-              <a:t>9/8/2026</a:t>
+              <a:t>9/9/2026</a:t>
             </a:fld>
             <a:endParaRPr lang="en-US"/>
           </a:p>
@@ -491,7 +490,7 @@
           <a:p>
             <a:fld id="{5BCAD085-E8A6-8845-BD4E-CB4CCA059FC4}" type="datetimeFigureOut">
               <a:rPr lang="en-US" smtClean="0"/>
-              <a:t>9/8/2026</a:t>
+              <a:t>9/9/2026</a:t>
             </a:fld>
             <a:endParaRPr lang="en-US"/>
           </a:p>
@@ -669,7 +668,7 @@
           <a:p>
             <a:fld id="{5BCAD085-E8A6-8845-BD4E-CB4CCA059FC4}" type="datetimeFigureOut">
               <a:rPr lang="en-US" smtClean="0"/>
-              <a:t>9/8/2026</a:t>
+              <a:t>9/9/2026</a:t>
             </a:fld>
             <a:endParaRPr lang="en-US"/>
           </a:p>
@@ -837,7 +836,7 @@
           <a:p>
             <a:fld id="{5BCAD085-E8A6-8845-BD4E-CB4CCA059FC4}" type="datetimeFigureOut">
               <a:rPr lang="en-US" smtClean="0"/>
-              <a:t>9/8/2026</a:t>
+              <a:t>9/9/2026</a:t>
             </a:fld>
             <a:endParaRPr lang="en-US"/>
           </a:p>
@@ -1082,7 +1081,7 @@
           <a:p>
             <a:fld id="{5BCAD085-E8A6-8845-BD4E-CB4CCA059FC4}" type="datetimeFigureOut">
               <a:rPr lang="en-US" smtClean="0"/>
-              <a:t>9/8/2026</a:t>
+              <a:t>9/9/2026</a:t>
             </a:fld>
             <a:endParaRPr lang="en-US"/>
           </a:p>
@@ -1367,7 +1366,7 @@
           <a:p>
             <a:fld id="{5BCAD085-E8A6-8845-BD4E-CB4CCA059FC4}" type="datetimeFigureOut">
               <a:rPr lang="en-US" smtClean="0"/>
-              <a:t>9/8/2026</a:t>
+              <a:t>9/9/2026</a:t>
             </a:fld>
             <a:endParaRPr lang="en-US"/>
           </a:p>
@@ -1786,7 +1785,7 @@
           <a:p>
             <a:fld id="{5BCAD085-E8A6-8845-BD4E-CB4CCA059FC4}" type="datetimeFigureOut">
               <a:rPr lang="en-US" smtClean="0"/>
-              <a:t>9/8/2026</a:t>
+              <a:t>9/9/2026</a:t>
             </a:fld>
             <a:endParaRPr lang="en-US"/>
           </a:p>
@@ -1903,7 +1902,7 @@
           <a:p>
             <a:fld id="{5BCAD085-E8A6-8845-BD4E-CB4CCA059FC4}" type="datetimeFigureOut">
               <a:rPr lang="en-US" smtClean="0"/>
-              <a:t>9/8/2026</a:t>
+              <a:t>9/9/2026</a:t>
             </a:fld>
             <a:endParaRPr lang="en-US"/>
           </a:p>
@@ -1998,7 +1997,7 @@
           <a:p>
             <a:fld id="{5BCAD085-E8A6-8845-BD4E-CB4CCA059FC4}" type="datetimeFigureOut">
               <a:rPr lang="en-US" smtClean="0"/>
-              <a:t>9/8/2026</a:t>
+              <a:t>9/9/2026</a:t>
             </a:fld>
             <a:endParaRPr lang="en-US"/>
           </a:p>
@@ -2273,7 +2272,7 @@
           <a:p>
             <a:fld id="{5BCAD085-E8A6-8845-BD4E-CB4CCA059FC4}" type="datetimeFigureOut">
               <a:rPr lang="en-US" smtClean="0"/>
-              <a:t>9/8/2026</a:t>
+              <a:t>9/9/2026</a:t>
             </a:fld>
             <a:endParaRPr lang="en-US"/>
           </a:p>
@@ -2525,7 +2524,7 @@
           <a:p>
             <a:fld id="{5BCAD085-E8A6-8845-BD4E-CB4CCA059FC4}" type="datetimeFigureOut">
               <a:rPr lang="en-US" smtClean="0"/>
-              <a:t>9/8/2026</a:t>
+              <a:t>9/9/2026</a:t>
             </a:fld>
             <a:endParaRPr lang="en-US"/>
           </a:p>
@@ -2736,7 +2735,7 @@
           <a:p>
             <a:fld id="{5BCAD085-E8A6-8845-BD4E-CB4CCA059FC4}" type="datetimeFigureOut">
               <a:rPr lang="en-US" smtClean="0"/>
-              <a:t>9/8/2026</a:t>
+              <a:t>9/9/2026</a:t>
             </a:fld>
             <a:endParaRPr lang="en-US"/>
           </a:p>
@@ -3163,7 +3162,7 @@
         </p:nvSpPr>
         <p:spPr>
           <a:xfrm>
-            <a:off x="1737569" y="1146340"/>
+            <a:off x="1652903" y="576953"/>
             <a:ext cx="8716027" cy="1138773"/>
           </a:xfrm>
           <a:prstGeom prst="rect">
@@ -3238,7 +3237,7 @@
         </p:nvSpPr>
         <p:spPr>
           <a:xfrm>
-            <a:off x="1738463" y="2802426"/>
+            <a:off x="1758192" y="1893172"/>
             <a:ext cx="2743199" cy="461665"/>
           </a:xfrm>
           <a:prstGeom prst="rect">
@@ -3286,14 +3285,14 @@
           <p:nvPr>
             <p:extLst>
               <p:ext uri="{D42A27DB-BD31-4B8C-83A1-F6EECF244321}">
-                <p14:modId xmlns:p14="http://schemas.microsoft.com/office/powerpoint/2010/main" val="1705579999"/>
+                <p14:modId xmlns:p14="http://schemas.microsoft.com/office/powerpoint/2010/main" val="1428851799"/>
               </p:ext>
             </p:extLst>
           </p:nvPr>
         </p:nvGraphicFramePr>
         <p:xfrm>
-          <a:off x="4224612" y="2799609"/>
-          <a:ext cx="5337764" cy="2966719"/>
+          <a:off x="3025397" y="2534087"/>
+          <a:ext cx="7343533" cy="4043680"/>
         </p:xfrm>
         <a:graphic>
           <a:graphicData uri="http://schemas.openxmlformats.org/drawingml/2006/table">
@@ -3302,17 +3301,24 @@
                 <a:tableStyleId>{5C22544A-7EE6-4342-B048-85BDC9FD1C3A}</a:tableStyleId>
               </a:tblPr>
               <a:tblGrid>
-                <a:gridCol w="549182">
+                <a:gridCol w="358475">
                   <a:extLst>
                     <a:ext uri="{9D8B030D-6E8A-4147-A177-3AD203B41FA5}">
                       <a16:colId xmlns:a16="http://schemas.microsoft.com/office/drawing/2014/main" val="1591194812"/>
                     </a:ext>
                   </a:extLst>
                 </a:gridCol>
-                <a:gridCol w="4788582">
+                <a:gridCol w="3512422">
                   <a:extLst>
                     <a:ext uri="{9D8B030D-6E8A-4147-A177-3AD203B41FA5}">
                       <a16:colId xmlns:a16="http://schemas.microsoft.com/office/drawing/2014/main" val="1862381799"/>
+                    </a:ext>
+                  </a:extLst>
+                </a:gridCol>
+                <a:gridCol w="3472636">
+                  <a:extLst>
+                    <a:ext uri="{9D8B030D-6E8A-4147-A177-3AD203B41FA5}">
+                      <a16:colId xmlns:a16="http://schemas.microsoft.com/office/drawing/2014/main" val="4282257590"/>
                     </a:ext>
                   </a:extLst>
                 </a:gridCol>
@@ -3323,7 +3329,7 @@
                     <a:bodyPr/>
                     <a:lstStyle/>
                     <a:p>
-                      <a:endParaRPr lang="en-US"/>
+                      <a:endParaRPr lang="en-US" dirty="0"/>
                     </a:p>
                   </a:txBody>
                   <a:tcPr/>
@@ -3340,6 +3346,22 @@
                     </a:p>
                   </a:txBody>
                   <a:tcPr/>
+                </a:tc>
+                <a:tc>
+                  <a:txBody>
+                    <a:bodyPr/>
+                    <a:lstStyle/>
+                    <a:p>
+                      <a:pPr>
+                        <a:buNone/>
+                      </a:pPr>
+                      <a:r>
+                        <a:rPr lang="en-US" dirty="0"/>
+                        <a:t>CONTRIBUTION</a:t>
+                      </a:r>
+                    </a:p>
+                  </a:txBody>
+                  <a:tcPr anchor="ctr"/>
                 </a:tc>
                 <a:extLst>
                   <a:ext uri="{0D108BD9-81ED-4DB2-BD59-A6C34878D82A}">
@@ -3368,7 +3390,24 @@
                     <a:p>
                       <a:r>
                         <a:rPr lang="en-US" b="1" dirty="0"/>
-                        <a:t>Kerolos Nagih (Team leader)</a:t>
+                        <a:t>Kerolos Nagih</a:t>
+                      </a:r>
+                    </a:p>
+                  </a:txBody>
+                  <a:tcPr/>
+                </a:tc>
+                <a:tc>
+                  <a:txBody>
+                    <a:bodyPr/>
+                    <a:lstStyle/>
+                    <a:p>
+                      <a:r>
+                        <a:rPr lang="en-US" b="1" u="sng" dirty="0"/>
+                        <a:t>Team Leader</a:t>
+                      </a:r>
+                      <a:r>
+                        <a:rPr lang="en-US" b="1" dirty="0"/>
+                        <a:t>—Model Training </a:t>
                       </a:r>
                     </a:p>
                   </a:txBody>
@@ -3402,6 +3441,19 @@
                       <a:r>
                         <a:rPr lang="en-US" b="1" dirty="0"/>
                         <a:t>Shnoda Faik Botros</a:t>
+                      </a:r>
+                    </a:p>
+                  </a:txBody>
+                  <a:tcPr/>
+                </a:tc>
+                <a:tc>
+                  <a:txBody>
+                    <a:bodyPr/>
+                    <a:lstStyle/>
+                    <a:p>
+                      <a:r>
+                        <a:rPr lang="en-US" b="1" dirty="0"/>
+                        <a:t>EDA &amp; Visualization</a:t>
                       </a:r>
                     </a:p>
                   </a:txBody>
@@ -3441,13 +3493,26 @@
                   </a:txBody>
                   <a:tcPr/>
                 </a:tc>
+                <a:tc>
+                  <a:txBody>
+                    <a:bodyPr/>
+                    <a:lstStyle/>
+                    <a:p>
+                      <a:r>
+                        <a:rPr lang="en-US" b="1" dirty="0"/>
+                        <a:t>Feature Engineering &amp; Preprocessing</a:t>
+                      </a:r>
+                    </a:p>
+                  </a:txBody>
+                  <a:tcPr/>
+                </a:tc>
                 <a:extLst>
                   <a:ext uri="{0D108BD9-81ED-4DB2-BD59-A6C34878D82A}">
                     <a16:rowId xmlns:a16="http://schemas.microsoft.com/office/drawing/2014/main" val="2788537626"/>
                   </a:ext>
                 </a:extLst>
               </a:tr>
-              <a:tr h="370840">
+              <a:tr h="452876">
                 <a:tc>
                   <a:txBody>
                     <a:bodyPr/>
@@ -3477,6 +3542,23 @@
                     </a:p>
                   </a:txBody>
                   <a:tcPr/>
+                </a:tc>
+                <a:tc>
+                  <a:txBody>
+                    <a:bodyPr/>
+                    <a:lstStyle/>
+                    <a:p>
+                      <a:pPr>
+                        <a:buNone/>
+                      </a:pPr>
+                      <a:r>
+                        <a:rPr lang="en-US" b="1" dirty="0"/>
+                        <a:t>Final Prediction System &amp; Integration</a:t>
+                      </a:r>
+                      <a:endParaRPr lang="en-US" dirty="0"/>
+                    </a:p>
+                  </a:txBody>
+                  <a:tcPr anchor="ctr"/>
                 </a:tc>
                 <a:extLst>
                   <a:ext uri="{0D108BD9-81ED-4DB2-BD59-A6C34878D82A}">
@@ -3511,6 +3593,23 @@
                   </a:txBody>
                   <a:tcPr/>
                 </a:tc>
+                <a:tc>
+                  <a:txBody>
+                    <a:bodyPr/>
+                    <a:lstStyle/>
+                    <a:p>
+                      <a:pPr>
+                        <a:buNone/>
+                      </a:pPr>
+                      <a:r>
+                        <a:rPr lang="en-US" b="1" dirty="0"/>
+                        <a:t>Data Understanding &amp; Dataset Analysis</a:t>
+                      </a:r>
+                      <a:endParaRPr lang="en-US" dirty="0"/>
+                    </a:p>
+                  </a:txBody>
+                  <a:tcPr anchor="ctr"/>
+                </a:tc>
                 <a:extLst>
                   <a:ext uri="{0D108BD9-81ED-4DB2-BD59-A6C34878D82A}">
                     <a16:rowId xmlns:a16="http://schemas.microsoft.com/office/drawing/2014/main" val="912589047"/>
@@ -3543,6 +3642,23 @@
                     </a:p>
                   </a:txBody>
                   <a:tcPr/>
+                </a:tc>
+                <a:tc>
+                  <a:txBody>
+                    <a:bodyPr/>
+                    <a:lstStyle/>
+                    <a:p>
+                      <a:pPr>
+                        <a:buNone/>
+                      </a:pPr>
+                      <a:r>
+                        <a:rPr lang="en-US" b="1" dirty="0"/>
+                        <a:t>Data Cleaning &amp; Missing Values</a:t>
+                      </a:r>
+                      <a:endParaRPr lang="en-US" dirty="0"/>
+                    </a:p>
+                  </a:txBody>
+                  <a:tcPr anchor="ctr"/>
                 </a:tc>
                 <a:extLst>
                   <a:ext uri="{0D108BD9-81ED-4DB2-BD59-A6C34878D82A}">
@@ -3584,6 +3700,23 @@
                   </a:txBody>
                   <a:tcPr/>
                 </a:tc>
+                <a:tc>
+                  <a:txBody>
+                    <a:bodyPr/>
+                    <a:lstStyle/>
+                    <a:p>
+                      <a:pPr>
+                        <a:buNone/>
+                      </a:pPr>
+                      <a:r>
+                        <a:rPr lang="en-US" b="1" dirty="0"/>
+                        <a:t>Model Evaluation &amp; Model Selection</a:t>
+                      </a:r>
+                      <a:endParaRPr lang="en-US" dirty="0"/>
+                    </a:p>
+                  </a:txBody>
+                  <a:tcPr anchor="ctr"/>
+                </a:tc>
                 <a:extLst>
                   <a:ext uri="{0D108BD9-81ED-4DB2-BD59-A6C34878D82A}">
                     <a16:rowId xmlns:a16="http://schemas.microsoft.com/office/drawing/2014/main" val="711879606"/>
@@ -3627,7 +3760,7 @@
         </p:nvSpPr>
         <p:spPr>
           <a:xfrm>
-            <a:off x="0" y="0"/>
+            <a:off x="50292" y="0"/>
             <a:ext cx="12191695" cy="6858000"/>
           </a:xfrm>
           <a:prstGeom prst="rect">
@@ -3774,8 +3907,14 @@
               </a:defRPr>
             </a:pPr>
             <a:r>
-              <a:t>10 / 10</a:t>
-            </a:r>
+              <a:rPr dirty="0"/>
+              <a:t>10 / </a:t>
+            </a:r>
+            <a:r>
+              <a:rPr lang="ar-EG" dirty="0"/>
+              <a:t>12</a:t>
+            </a:r>
+            <a:endParaRPr dirty="0"/>
           </a:p>
         </p:txBody>
       </p:sp>
@@ -3887,42 +4026,66 @@
           </a:p>
         </p:txBody>
       </p:sp>
-      <p:sp>
-        <p:nvSpPr>
-          <p:cNvPr id="13" name="TextBox 12"/>
-          <p:cNvSpPr txBox="1"/>
-          <p:nvPr/>
-        </p:nvSpPr>
-        <p:spPr>
-          <a:xfrm>
-            <a:off x="7818120" y="5074920"/>
-            <a:ext cx="3474720" cy="594360"/>
-          </a:xfrm>
-          <a:prstGeom prst="rect">
-            <a:avLst/>
-          </a:prstGeom>
-          <a:noFill/>
-        </p:spPr>
-        <p:txBody>
-          <a:bodyPr wrap="square">
-            <a:spAutoFit/>
-          </a:bodyPr>
-          <a:lstStyle/>
-          <a:p>
-            <a:pPr algn="l">
-              <a:defRPr sz="1250" b="0">
-                <a:solidFill>
-                  <a:srgbClr val="697584"/>
-                </a:solidFill>
-                <a:latin typeface="Aptos"/>
-              </a:defRPr>
-            </a:pPr>
-            <a:r>
-              <a:t>Add the actual prediction output here as the project demo.</a:t>
-            </a:r>
-          </a:p>
-        </p:txBody>
-      </p:sp>
+      <p:pic>
+        <p:nvPicPr>
+          <p:cNvPr id="7" name="Picture 6">
+            <a:extLst>
+              <a:ext uri="{FF2B5EF4-FFF2-40B4-BE49-F238E27FC236}">
+                <a16:creationId xmlns:a16="http://schemas.microsoft.com/office/drawing/2014/main" id="{7640DE4A-7627-DA3A-A7DD-99E4D59D3EF6}"/>
+              </a:ext>
+            </a:extLst>
+          </p:cNvPr>
+          <p:cNvPicPr>
+            <a:picLocks noChangeAspect="1"/>
+          </p:cNvPicPr>
+          <p:nvPr/>
+        </p:nvPicPr>
+        <p:blipFill>
+          <a:blip r:embed="rId2"/>
+          <a:stretch>
+            <a:fillRect/>
+          </a:stretch>
+        </p:blipFill>
+        <p:spPr>
+          <a:xfrm>
+            <a:off x="2748790" y="3819821"/>
+            <a:ext cx="4259610" cy="2958285"/>
+          </a:xfrm>
+          <a:prstGeom prst="rect">
+            <a:avLst/>
+          </a:prstGeom>
+        </p:spPr>
+      </p:pic>
+      <p:pic>
+        <p:nvPicPr>
+          <p:cNvPr id="9" name="Picture 8">
+            <a:extLst>
+              <a:ext uri="{FF2B5EF4-FFF2-40B4-BE49-F238E27FC236}">
+                <a16:creationId xmlns:a16="http://schemas.microsoft.com/office/drawing/2014/main" id="{8E98150F-81C4-508B-E2A3-EF992927C975}"/>
+              </a:ext>
+            </a:extLst>
+          </p:cNvPr>
+          <p:cNvPicPr>
+            <a:picLocks noChangeAspect="1"/>
+          </p:cNvPicPr>
+          <p:nvPr/>
+        </p:nvPicPr>
+        <p:blipFill>
+          <a:blip r:embed="rId3"/>
+          <a:stretch>
+            <a:fillRect/>
+          </a:stretch>
+        </p:blipFill>
+        <p:spPr>
+          <a:xfrm>
+            <a:off x="321734" y="941507"/>
+            <a:ext cx="4199720" cy="2809213"/>
+          </a:xfrm>
+          <a:prstGeom prst="rect">
+            <a:avLst/>
+          </a:prstGeom>
+        </p:spPr>
+      </p:pic>
     </p:spTree>
   </p:cSld>
   <p:clrMapOvr>
@@ -4041,16 +4204,8 @@
               </a:defRPr>
             </a:pPr>
             <a:r>
-              <a:rPr lang="en-US" dirty="0"/>
-              <a:t>11</a:t>
-            </a:r>
-            <a:r>
-              <a:rPr dirty="0"/>
-              <a:t>/ </a:t>
-            </a:r>
-            <a:r>
-              <a:rPr lang="en-US" dirty="0"/>
-              <a:t>13</a:t>
+              <a:rPr lang="ar-EG" dirty="0"/>
+              <a:t>11/12</a:t>
             </a:r>
             <a:endParaRPr dirty="0"/>
           </a:p>
@@ -4259,11 +4414,11 @@
                 <a:ea typeface="+mn-lt"/>
                 <a:cs typeface="+mn-lt"/>
               </a:rPr>
-              <a:t>Deploy the model as a real-time web service</a:t>
-            </a:r>
-            <a:endParaRPr lang="en-US" sz="2400" dirty="0">
-              <a:ea typeface="Calibri"/>
-              <a:cs typeface="Calibri"/>
+              <a:t>Deploy the application to a hosted production environment</a:t>
+            </a:r>
+            <a:endParaRPr lang="ar-EG" sz="2400" dirty="0">
+              <a:ea typeface="+mn-lt"/>
+              <a:cs typeface="+mn-lt"/>
             </a:endParaRPr>
           </a:p>
           <a:p>
@@ -4306,249 +4461,6 @@
 </file>
 
 <file path=ppt/slides/slide12.xml><?xml version="1.0" encoding="utf-8"?>
-<p:sld xmlns:a="http://schemas.openxmlformats.org/drawingml/2006/main" xmlns:r="http://schemas.openxmlformats.org/officeDocument/2006/relationships" xmlns:p="http://schemas.openxmlformats.org/presentationml/2006/main">
-  <p:cSld>
-    <p:spTree>
-      <p:nvGrpSpPr>
-        <p:cNvPr id="1" name="">
-          <a:extLst>
-            <a:ext uri="{FF2B5EF4-FFF2-40B4-BE49-F238E27FC236}">
-              <a16:creationId xmlns:a16="http://schemas.microsoft.com/office/drawing/2014/main" id="{6FF022B7-B2B1-AF0A-CD0A-EFA47A14379C}"/>
-            </a:ext>
-          </a:extLst>
-        </p:cNvPr>
-        <p:cNvGrpSpPr/>
-        <p:nvPr/>
-      </p:nvGrpSpPr>
-      <p:grpSpPr>
-        <a:xfrm>
-          <a:off x="0" y="0"/>
-          <a:ext cx="0" cy="0"/>
-          <a:chOff x="0" y="0"/>
-          <a:chExt cx="0" cy="0"/>
-        </a:xfrm>
-      </p:grpSpPr>
-      <p:sp>
-        <p:nvSpPr>
-          <p:cNvPr id="3" name="Rectangle 2">
-            <a:extLst>
-              <a:ext uri="{FF2B5EF4-FFF2-40B4-BE49-F238E27FC236}">
-                <a16:creationId xmlns:a16="http://schemas.microsoft.com/office/drawing/2014/main" id="{C86B6D05-D418-5708-CF61-2083DF62AA95}"/>
-              </a:ext>
-            </a:extLst>
-          </p:cNvPr>
-          <p:cNvSpPr/>
-          <p:nvPr/>
-        </p:nvSpPr>
-        <p:spPr>
-          <a:xfrm>
-            <a:off x="0" y="0"/>
-            <a:ext cx="100584" cy="6858000"/>
-          </a:xfrm>
-          <a:prstGeom prst="rect">
-            <a:avLst/>
-          </a:prstGeom>
-          <a:solidFill>
-            <a:srgbClr val="2A69AF"/>
-          </a:solidFill>
-          <a:ln>
-            <a:noFill/>
-          </a:ln>
-        </p:spPr>
-        <p:style>
-          <a:lnRef idx="1">
-            <a:schemeClr val="accent1"/>
-          </a:lnRef>
-          <a:fillRef idx="3">
-            <a:schemeClr val="accent1"/>
-          </a:fillRef>
-          <a:effectRef idx="2">
-            <a:schemeClr val="accent1"/>
-          </a:effectRef>
-          <a:fontRef idx="minor">
-            <a:schemeClr val="lt1"/>
-          </a:fontRef>
-        </p:style>
-        <p:txBody>
-          <a:bodyPr rtlCol="0" anchor="ctr"/>
-          <a:lstStyle/>
-          <a:p>
-            <a:pPr algn="ctr"/>
-            <a:endParaRPr/>
-          </a:p>
-        </p:txBody>
-      </p:sp>
-      <p:sp>
-        <p:nvSpPr>
-          <p:cNvPr id="6" name="TextBox 5">
-            <a:extLst>
-              <a:ext uri="{FF2B5EF4-FFF2-40B4-BE49-F238E27FC236}">
-                <a16:creationId xmlns:a16="http://schemas.microsoft.com/office/drawing/2014/main" id="{ACAB139C-09FD-C301-E8DF-60C30955877A}"/>
-              </a:ext>
-            </a:extLst>
-          </p:cNvPr>
-          <p:cNvSpPr txBox="1"/>
-          <p:nvPr/>
-        </p:nvSpPr>
-        <p:spPr>
-          <a:xfrm>
-            <a:off x="10881360" y="6355080"/>
-            <a:ext cx="731520" cy="228600"/>
-          </a:xfrm>
-          <a:prstGeom prst="rect">
-            <a:avLst/>
-          </a:prstGeom>
-          <a:noFill/>
-        </p:spPr>
-        <p:txBody>
-          <a:bodyPr wrap="square" lIns="91440" tIns="45720" rIns="91440" bIns="45720" anchor="t">
-            <a:spAutoFit/>
-          </a:bodyPr>
-          <a:lstStyle/>
-          <a:p>
-            <a:pPr algn="r">
-              <a:defRPr sz="900" b="0">
-                <a:solidFill>
-                  <a:srgbClr val="697584"/>
-                </a:solidFill>
-                <a:latin typeface="Aptos"/>
-              </a:defRPr>
-            </a:pPr>
-            <a:r>
-              <a:rPr lang="en-US" dirty="0"/>
-              <a:t>12</a:t>
-            </a:r>
-            <a:r>
-              <a:rPr dirty="0"/>
-              <a:t>/ </a:t>
-            </a:r>
-            <a:r>
-              <a:rPr lang="en-US" dirty="0"/>
-              <a:t>13</a:t>
-            </a:r>
-            <a:endParaRPr dirty="0"/>
-          </a:p>
-        </p:txBody>
-      </p:sp>
-      <p:sp>
-        <p:nvSpPr>
-          <p:cNvPr id="4" name="TextBox 3">
-            <a:extLst>
-              <a:ext uri="{FF2B5EF4-FFF2-40B4-BE49-F238E27FC236}">
-                <a16:creationId xmlns:a16="http://schemas.microsoft.com/office/drawing/2014/main" id="{AD56848B-C753-C72D-A297-5E993A87F9A1}"/>
-              </a:ext>
-            </a:extLst>
-          </p:cNvPr>
-          <p:cNvSpPr txBox="1"/>
-          <p:nvPr/>
-        </p:nvSpPr>
-        <p:spPr>
-          <a:xfrm>
-            <a:off x="630261" y="256033"/>
-            <a:ext cx="4531360" cy="461665"/>
-          </a:xfrm>
-          <a:prstGeom prst="rect">
-            <a:avLst/>
-          </a:prstGeom>
-          <a:noFill/>
-        </p:spPr>
-        <p:txBody>
-          <a:bodyPr rot="0" spcFirstLastPara="0" vertOverflow="overflow" horzOverflow="overflow" vert="horz" wrap="square" lIns="91440" tIns="45720" rIns="91440" bIns="45720" numCol="1" spcCol="0" rtlCol="0" fromWordArt="0" anchor="t" anchorCtr="0" forceAA="0" compatLnSpc="1">
-            <a:prstTxWarp prst="textNoShape">
-              <a:avLst/>
-            </a:prstTxWarp>
-            <a:spAutoFit/>
-          </a:bodyPr>
-          <a:lstStyle/>
-          <a:p>
-            <a:r>
-              <a:rPr lang="en-US" sz="2400" b="1" dirty="0">
-                <a:ea typeface="+mn-lt"/>
-                <a:cs typeface="+mn-lt"/>
-              </a:rPr>
-              <a:t>11.Smart Recruitment Application</a:t>
-            </a:r>
-            <a:endParaRPr lang="en-US" sz="2400" b="1" dirty="0">
-              <a:ea typeface="Calibri"/>
-              <a:cs typeface="Calibri"/>
-            </a:endParaRPr>
-          </a:p>
-        </p:txBody>
-      </p:sp>
-      <p:pic>
-        <p:nvPicPr>
-          <p:cNvPr id="5" name="Picture 4">
-            <a:extLst>
-              <a:ext uri="{FF2B5EF4-FFF2-40B4-BE49-F238E27FC236}">
-                <a16:creationId xmlns:a16="http://schemas.microsoft.com/office/drawing/2014/main" id="{2AF5B8F5-6C2F-5BB5-7BAE-4D77767ED794}"/>
-              </a:ext>
-            </a:extLst>
-          </p:cNvPr>
-          <p:cNvPicPr>
-            <a:picLocks noChangeAspect="1"/>
-          </p:cNvPicPr>
-          <p:nvPr/>
-        </p:nvPicPr>
-        <p:blipFill>
-          <a:blip r:embed="rId2"/>
-          <a:stretch>
-            <a:fillRect/>
-          </a:stretch>
-        </p:blipFill>
-        <p:spPr>
-          <a:xfrm>
-            <a:off x="343218" y="1457960"/>
-            <a:ext cx="5734685" cy="3688080"/>
-          </a:xfrm>
-          <a:prstGeom prst="rect">
-            <a:avLst/>
-          </a:prstGeom>
-        </p:spPr>
-      </p:pic>
-      <p:pic>
-        <p:nvPicPr>
-          <p:cNvPr id="7" name="Picture 6">
-            <a:extLst>
-              <a:ext uri="{FF2B5EF4-FFF2-40B4-BE49-F238E27FC236}">
-                <a16:creationId xmlns:a16="http://schemas.microsoft.com/office/drawing/2014/main" id="{E11BE806-14FF-1095-BF9E-59410E820740}"/>
-              </a:ext>
-            </a:extLst>
-          </p:cNvPr>
-          <p:cNvPicPr>
-            <a:picLocks noChangeAspect="1"/>
-          </p:cNvPicPr>
-          <p:nvPr/>
-        </p:nvPicPr>
-        <p:blipFill>
-          <a:blip r:embed="rId3"/>
-          <a:stretch>
-            <a:fillRect/>
-          </a:stretch>
-        </p:blipFill>
-        <p:spPr>
-          <a:xfrm>
-            <a:off x="6359230" y="1483360"/>
-            <a:ext cx="5498421" cy="3677920"/>
-          </a:xfrm>
-          <a:prstGeom prst="rect">
-            <a:avLst/>
-          </a:prstGeom>
-        </p:spPr>
-      </p:pic>
-    </p:spTree>
-    <p:extLst>
-      <p:ext uri="{BB962C8B-B14F-4D97-AF65-F5344CB8AC3E}">
-        <p14:creationId xmlns:p14="http://schemas.microsoft.com/office/powerpoint/2010/main" val="2761608567"/>
-      </p:ext>
-    </p:extLst>
-  </p:cSld>
-  <p:clrMapOvr>
-    <a:masterClrMapping/>
-  </p:clrMapOvr>
-</p:sld>
-</file>
-
-<file path=ppt/slides/slide13.xml><?xml version="1.0" encoding="utf-8"?>
 <p:sld xmlns:a="http://schemas.openxmlformats.org/drawingml/2006/main" xmlns:r="http://schemas.openxmlformats.org/officeDocument/2006/relationships" xmlns:p="http://schemas.openxmlformats.org/presentationml/2006/main">
   <p:cSld>
     <p:spTree>
@@ -4658,16 +4570,8 @@
               </a:defRPr>
             </a:pPr>
             <a:r>
-              <a:rPr lang="en-US" dirty="0"/>
-              <a:t>13</a:t>
-            </a:r>
-            <a:r>
-              <a:rPr dirty="0"/>
-              <a:t> / </a:t>
-            </a:r>
-            <a:r>
-              <a:rPr lang="en-US" dirty="0"/>
-              <a:t>13</a:t>
+              <a:rPr lang="ar-EG" dirty="0"/>
+              <a:t>12/12</a:t>
             </a:r>
             <a:endParaRPr dirty="0"/>
           </a:p>
@@ -4916,8 +4820,14 @@
               </a:defRPr>
             </a:pPr>
             <a:r>
-              <a:t>02 / 10</a:t>
-            </a:r>
+              <a:rPr dirty="0"/>
+              <a:t>02 / </a:t>
+            </a:r>
+            <a:r>
+              <a:rPr lang="ar-EG" dirty="0"/>
+              <a:t>12</a:t>
+            </a:r>
+            <a:endParaRPr dirty="0"/>
           </a:p>
         </p:txBody>
       </p:sp>
@@ -5290,7 +5200,7 @@
         <p:spPr>
           <a:xfrm>
             <a:off x="464382" y="197622"/>
-            <a:ext cx="11145520" cy="3847207"/>
+            <a:ext cx="11145520" cy="3416320"/>
           </a:xfrm>
           <a:prstGeom prst="rect">
             <a:avLst/>
@@ -5307,95 +5217,89 @@
           <a:lstStyle/>
           <a:p>
             <a:r>
-              <a:rPr lang="en-US" sz="2800" b="1" dirty="0"/>
-              <a:t>1.project description </a:t>
-            </a:r>
-            <a:endParaRPr lang="en-US" sz="2800" b="1" dirty="0">
-              <a:ea typeface="Calibri"/>
-              <a:cs typeface="Calibri"/>
-            </a:endParaRPr>
-          </a:p>
-          <a:p>
-            <a:r>
-              <a:rPr lang="en-US" dirty="0">
-                <a:ea typeface="+mn-lt"/>
-                <a:cs typeface="+mn-lt"/>
-              </a:rPr>
-              <a:t>Smart Recruitment Assistant Industry Background</a:t>
-            </a:r>
-            <a:endParaRPr lang="en-US" dirty="0"/>
-          </a:p>
-          <a:p>
-            <a:r>
-              <a:rPr lang="en-US" dirty="0">
-                <a:ea typeface="+mn-lt"/>
-                <a:cs typeface="+mn-lt"/>
-              </a:rPr>
-              <a:t>Modern organizations receive hundreds of applications for each vacancy. Human Resources departments increasingly use AI systems to support recruitment decisions and identify suitable candidates more efficiently.</a:t>
-            </a:r>
-          </a:p>
-          <a:p>
-            <a:endParaRPr lang="en-US"/>
-          </a:p>
-          <a:p>
-            <a:r>
-              <a:rPr lang="en-US" dirty="0">
-                <a:ea typeface="+mn-lt"/>
-                <a:cs typeface="+mn-lt"/>
-              </a:rPr>
-              <a:t>Project Objective</a:t>
-            </a:r>
-            <a:endParaRPr lang="en-US" dirty="0"/>
-          </a:p>
-          <a:p>
-            <a:r>
-              <a:rPr lang="en-US" dirty="0">
-                <a:ea typeface="+mn-lt"/>
-                <a:cs typeface="+mn-lt"/>
-              </a:rPr>
-              <a:t>Develop an intelligent recruitment screening system that predicts whether a candidate should advance to the next stage of the hiring process.</a:t>
-            </a:r>
-            <a:endParaRPr lang="en-US" dirty="0"/>
-          </a:p>
-          <a:p>
-            <a:endParaRPr lang="en-US"/>
-          </a:p>
-          <a:p>
-            <a:r>
-              <a:rPr lang="en-US" dirty="0">
-                <a:ea typeface="+mn-lt"/>
-                <a:cs typeface="+mn-lt"/>
-              </a:rPr>
-              <a:t>Recommended Dataset</a:t>
-            </a:r>
-            <a:endParaRPr lang="en-US" dirty="0"/>
-          </a:p>
-          <a:p>
-            <a:r>
-              <a:rPr lang="en-US" dirty="0">
-                <a:ea typeface="+mn-lt"/>
-                <a:cs typeface="+mn-lt"/>
-              </a:rPr>
-              <a:t>Primary Dataset</a:t>
-            </a:r>
-            <a:endParaRPr lang="en-US" dirty="0"/>
-          </a:p>
-          <a:p>
-            <a:r>
-              <a:rPr lang="en-US" dirty="0">
-                <a:ea typeface="+mn-lt"/>
-                <a:cs typeface="+mn-lt"/>
-              </a:rPr>
-              <a:t>HR Analytics: Job Change of Data Scientists Dataset</a:t>
-            </a:r>
-            <a:endParaRPr lang="en-US" dirty="0"/>
-          </a:p>
-          <a:p>
-            <a:pPr algn="l"/>
-            <a:endParaRPr lang="en-US" dirty="0">
-              <a:ea typeface="Calibri"/>
-              <a:cs typeface="Calibri"/>
-            </a:endParaRPr>
+              <a:rPr lang="ar-EG" sz="2400" b="1" dirty="0"/>
+              <a:t>1</a:t>
+            </a:r>
+            <a:r>
+              <a:rPr lang="en-US" sz="2400" b="1" dirty="0"/>
+              <a:t>. Project Overview</a:t>
+            </a:r>
+          </a:p>
+          <a:p>
+            <a:pPr marL="342900" indent="-342900">
+              <a:buFont typeface="Arial" panose="020B0604020202020204" pitchFamily="34" charset="0"/>
+              <a:buChar char="•"/>
+            </a:pPr>
+            <a:r>
+              <a:rPr lang="ar-EG" sz="2400" b="1" dirty="0"/>
+              <a:t> </a:t>
+            </a:r>
+            <a:r>
+              <a:rPr lang="en-US" sz="2400" b="1" dirty="0"/>
+              <a:t>Industry Background</a:t>
+            </a:r>
+            <a:br>
+              <a:rPr lang="en-US" sz="2400" dirty="0"/>
+            </a:br>
+            <a:r>
+              <a:rPr lang="en-US" sz="2400" dirty="0"/>
+              <a:t>Modern organizations receive large numbers of applications, making manual screening time-consuming and difficult to scale.</a:t>
+            </a:r>
+          </a:p>
+          <a:p>
+            <a:pPr marL="342900" indent="-342900">
+              <a:buFont typeface="Arial" panose="020B0604020202020204" pitchFamily="34" charset="0"/>
+              <a:buChar char="•"/>
+            </a:pPr>
+            <a:r>
+              <a:rPr lang="ar-EG" sz="2400" b="1" dirty="0"/>
+              <a:t> </a:t>
+            </a:r>
+            <a:r>
+              <a:rPr lang="en-US" sz="2400" b="1" dirty="0"/>
+              <a:t>Project Goal</a:t>
+            </a:r>
+            <a:br>
+              <a:rPr lang="en-US" sz="2400" dirty="0"/>
+            </a:br>
+            <a:r>
+              <a:rPr lang="en-US" sz="2400" dirty="0"/>
+              <a:t>Build a Machine Learning system that predicts a candidate’s </a:t>
+            </a:r>
+            <a:r>
+              <a:rPr lang="en-US" sz="2400" b="1" dirty="0"/>
+              <a:t>job-change intention</a:t>
+            </a:r>
+            <a:r>
+              <a:rPr lang="en-US" sz="2400" dirty="0"/>
+              <a:t> and provides HR with an additional signal during initial screening.</a:t>
+            </a:r>
+          </a:p>
+          <a:p>
+            <a:pPr marL="342900" indent="-342900">
+              <a:buFont typeface="Arial" panose="020B0604020202020204" pitchFamily="34" charset="0"/>
+              <a:buChar char="•"/>
+            </a:pPr>
+            <a:r>
+              <a:rPr lang="ar-EG" sz="2400" b="1" dirty="0"/>
+              <a:t> </a:t>
+            </a:r>
+            <a:r>
+              <a:rPr lang="en-US" sz="2400" b="1" dirty="0"/>
+              <a:t>Dataset</a:t>
+            </a:r>
+            <a:br>
+              <a:rPr lang="en-US" sz="2400" dirty="0"/>
+            </a:br>
+            <a:r>
+              <a:rPr lang="en-US" sz="2400" dirty="0"/>
+              <a:t>HR Analytics: Job Change of Data Scientists — </a:t>
+            </a:r>
+            <a:r>
+              <a:rPr lang="en-US" sz="2400" b="1" dirty="0"/>
+              <a:t>19,158 records × 14 columns</a:t>
+            </a:r>
+            <a:endParaRPr lang="en-US" sz="2400" dirty="0"/>
           </a:p>
         </p:txBody>
       </p:sp>
@@ -5543,6 +5447,7 @@
               </a:defRPr>
             </a:pPr>
             <a:r>
+              <a:rPr dirty="0"/>
               <a:t>2. Dataset &amp; Target</a:t>
             </a:r>
           </a:p>
@@ -5579,8 +5484,14 @@
               </a:defRPr>
             </a:pPr>
             <a:r>
-              <a:t>03 / 10</a:t>
-            </a:r>
+              <a:rPr dirty="0"/>
+              <a:t>03 / </a:t>
+            </a:r>
+            <a:r>
+              <a:rPr lang="ar-EG" dirty="0"/>
+              <a:t>12</a:t>
+            </a:r>
+            <a:endParaRPr dirty="0"/>
           </a:p>
         </p:txBody>
       </p:sp>
@@ -6436,8 +6347,14 @@
               </a:defRPr>
             </a:pPr>
             <a:r>
-              <a:t>04 / 10</a:t>
-            </a:r>
+              <a:rPr dirty="0"/>
+              <a:t>04 / </a:t>
+            </a:r>
+            <a:r>
+              <a:rPr lang="ar-EG" dirty="0"/>
+              <a:t>12</a:t>
+            </a:r>
+            <a:endParaRPr dirty="0"/>
           </a:p>
         </p:txBody>
       </p:sp>
@@ -7131,8 +7048,14 @@
               </a:defRPr>
             </a:pPr>
             <a:r>
-              <a:t>05 / 10</a:t>
-            </a:r>
+              <a:rPr dirty="0"/>
+              <a:t>05 / </a:t>
+            </a:r>
+            <a:r>
+              <a:rPr lang="ar-EG" dirty="0"/>
+              <a:t>12</a:t>
+            </a:r>
+            <a:endParaRPr dirty="0"/>
           </a:p>
         </p:txBody>
       </p:sp>
@@ -7874,8 +7797,14 @@
               </a:defRPr>
             </a:pPr>
             <a:r>
-              <a:t>06 / 10</a:t>
-            </a:r>
+              <a:rPr dirty="0"/>
+              <a:t>06 / </a:t>
+            </a:r>
+            <a:r>
+              <a:rPr lang="ar-EG" dirty="0"/>
+              <a:t>12</a:t>
+            </a:r>
+            <a:endParaRPr dirty="0"/>
           </a:p>
         </p:txBody>
       </p:sp>
@@ -9606,8 +9535,14 @@
               </a:defRPr>
             </a:pPr>
             <a:r>
-              <a:t>07 / 10</a:t>
-            </a:r>
+              <a:rPr dirty="0"/>
+              <a:t>07 / </a:t>
+            </a:r>
+            <a:r>
+              <a:rPr lang="ar-EG" dirty="0"/>
+              <a:t>12</a:t>
+            </a:r>
+            <a:endParaRPr dirty="0"/>
           </a:p>
         </p:txBody>
       </p:sp>
@@ -10693,8 +10628,14 @@
               </a:defRPr>
             </a:pPr>
             <a:r>
-              <a:t>08 / 10</a:t>
-            </a:r>
+              <a:rPr dirty="0"/>
+              <a:t>08 / </a:t>
+            </a:r>
+            <a:r>
+              <a:rPr lang="ar-EG" dirty="0"/>
+              <a:t>12</a:t>
+            </a:r>
+            <a:endParaRPr dirty="0"/>
           </a:p>
         </p:txBody>
       </p:sp>
@@ -11062,8 +11003,14 @@
               </a:defRPr>
             </a:pPr>
             <a:r>
-              <a:t>09 / 10</a:t>
-            </a:r>
+              <a:rPr dirty="0"/>
+              <a:t>09 / </a:t>
+            </a:r>
+            <a:r>
+              <a:rPr lang="ar-EG" dirty="0"/>
+              <a:t>12</a:t>
+            </a:r>
+            <a:endParaRPr dirty="0"/>
           </a:p>
         </p:txBody>
       </p:sp>
